--- a/SVP-mobiweb-web-guide-Monday.pptx
+++ b/SVP-mobiweb-web-guide-Monday.pptx
@@ -10,9 +10,12 @@
     <p:sldId id="259" r:id="rId4"/>
     <p:sldId id="265" r:id="rId5"/>
     <p:sldId id="261" r:id="rId6"/>
-    <p:sldId id="267" r:id="rId7"/>
-    <p:sldId id="268" r:id="rId8"/>
-    <p:sldId id="269" r:id="rId9"/>
+    <p:sldId id="270" r:id="rId7"/>
+    <p:sldId id="267" r:id="rId8"/>
+    <p:sldId id="271" r:id="rId9"/>
+    <p:sldId id="268" r:id="rId10"/>
+    <p:sldId id="272" r:id="rId11"/>
+    <p:sldId id="269" r:id="rId12"/>
   </p:sldIdLst>
   <p:sldSz cx="12192000" cy="6858000"/>
   <p:notesSz cx="6858000" cy="9144000"/>
@@ -1329,7 +1332,7 @@
           <a:p>
             <a:fld id="{9BA68BF7-7197-B04D-ADD6-A4F729BF548A}" type="datetimeFigureOut">
               <a:rPr lang="en-US" smtClean="0"/>
-              <a:t>8/17/24</a:t>
+              <a:t>8/18/2025</a:t>
             </a:fld>
             <a:endParaRPr lang="en-US"/>
           </a:p>
@@ -1567,7 +1570,7 @@
           <a:p>
             <a:fld id="{9BA68BF7-7197-B04D-ADD6-A4F729BF548A}" type="datetimeFigureOut">
               <a:rPr lang="en-US" smtClean="0"/>
-              <a:t>8/17/24</a:t>
+              <a:t>8/18/2025</a:t>
             </a:fld>
             <a:endParaRPr lang="en-US"/>
           </a:p>
@@ -1747,7 +1750,7 @@
           <a:p>
             <a:fld id="{9BA68BF7-7197-B04D-ADD6-A4F729BF548A}" type="datetimeFigureOut">
               <a:rPr lang="en-US" smtClean="0"/>
-              <a:t>8/17/24</a:t>
+              <a:t>8/18/2025</a:t>
             </a:fld>
             <a:endParaRPr lang="en-US"/>
           </a:p>
@@ -1942,7 +1945,7 @@
           <a:p>
             <a:fld id="{9BA68BF7-7197-B04D-ADD6-A4F729BF548A}" type="datetimeFigureOut">
               <a:rPr lang="en-US" smtClean="0"/>
-              <a:t>8/17/24</a:t>
+              <a:t>8/18/2025</a:t>
             </a:fld>
             <a:endParaRPr lang="en-US"/>
           </a:p>
@@ -2218,7 +2221,7 @@
           <a:p>
             <a:fld id="{9BA68BF7-7197-B04D-ADD6-A4F729BF548A}" type="datetimeFigureOut">
               <a:rPr lang="en-US" smtClean="0"/>
-              <a:t>8/17/24</a:t>
+              <a:t>8/18/2025</a:t>
             </a:fld>
             <a:endParaRPr lang="en-US"/>
           </a:p>
@@ -3418,7 +3421,7 @@
           <a:p>
             <a:fld id="{9BA68BF7-7197-B04D-ADD6-A4F729BF548A}" type="datetimeFigureOut">
               <a:rPr lang="en-US" smtClean="0"/>
-              <a:t>8/17/24</a:t>
+              <a:t>8/18/2025</a:t>
             </a:fld>
             <a:endParaRPr lang="en-US"/>
           </a:p>
@@ -3807,7 +3810,7 @@
           <a:p>
             <a:fld id="{9BA68BF7-7197-B04D-ADD6-A4F729BF548A}" type="datetimeFigureOut">
               <a:rPr lang="en-US" smtClean="0"/>
-              <a:t>8/17/24</a:t>
+              <a:t>8/18/2025</a:t>
             </a:fld>
             <a:endParaRPr lang="en-US"/>
           </a:p>
@@ -3930,7 +3933,7 @@
           <a:p>
             <a:fld id="{9BA68BF7-7197-B04D-ADD6-A4F729BF548A}" type="datetimeFigureOut">
               <a:rPr lang="en-US" smtClean="0"/>
-              <a:t>8/17/24</a:t>
+              <a:t>8/18/2025</a:t>
             </a:fld>
             <a:endParaRPr lang="en-US"/>
           </a:p>
@@ -4025,7 +4028,7 @@
           <a:p>
             <a:fld id="{9BA68BF7-7197-B04D-ADD6-A4F729BF548A}" type="datetimeFigureOut">
               <a:rPr lang="en-US" smtClean="0"/>
-              <a:t>8/17/24</a:t>
+              <a:t>8/18/2025</a:t>
             </a:fld>
             <a:endParaRPr lang="en-US"/>
           </a:p>
@@ -4788,7 +4791,7 @@
           <a:p>
             <a:fld id="{9BA68BF7-7197-B04D-ADD6-A4F729BF548A}" type="datetimeFigureOut">
               <a:rPr lang="en-US" smtClean="0"/>
-              <a:t>8/17/24</a:t>
+              <a:t>8/18/2025</a:t>
             </a:fld>
             <a:endParaRPr lang="en-US"/>
           </a:p>
@@ -5628,7 +5631,7 @@
           <a:p>
             <a:fld id="{9BA68BF7-7197-B04D-ADD6-A4F729BF548A}" type="datetimeFigureOut">
               <a:rPr lang="en-US" smtClean="0"/>
-              <a:t>8/17/24</a:t>
+              <a:t>8/18/2025</a:t>
             </a:fld>
             <a:endParaRPr lang="en-US"/>
           </a:p>
@@ -5854,7 +5857,7 @@
           <a:p>
             <a:fld id="{9BA68BF7-7197-B04D-ADD6-A4F729BF548A}" type="datetimeFigureOut">
               <a:rPr lang="en-US" smtClean="0"/>
-              <a:t>8/17/24</a:t>
+              <a:t>8/18/2025</a:t>
             </a:fld>
             <a:endParaRPr lang="en-US"/>
           </a:p>
@@ -6922,6 +6925,516 @@
 </p:sld>
 </file>
 
+<file path=ppt/slides/slide10.xml><?xml version="1.0" encoding="utf-8"?>
+<p:sld xmlns:a="http://schemas.openxmlformats.org/drawingml/2006/main" xmlns:r="http://schemas.openxmlformats.org/officeDocument/2006/relationships" xmlns:p="http://schemas.openxmlformats.org/presentationml/2006/main" show="0">
+  <p:cSld>
+    <p:spTree>
+      <p:nvGrpSpPr>
+        <p:cNvPr id="1" name=""/>
+        <p:cNvGrpSpPr/>
+        <p:nvPr/>
+      </p:nvGrpSpPr>
+      <p:grpSpPr>
+        <a:xfrm>
+          <a:off x="0" y="0"/>
+          <a:ext cx="0" cy="0"/>
+          <a:chOff x="0" y="0"/>
+          <a:chExt cx="0" cy="0"/>
+        </a:xfrm>
+      </p:grpSpPr>
+      <p:sp>
+        <p:nvSpPr>
+          <p:cNvPr id="2" name="Title 1">
+            <a:extLst>
+              <a:ext uri="{FF2B5EF4-FFF2-40B4-BE49-F238E27FC236}">
+                <a16:creationId xmlns:a16="http://schemas.microsoft.com/office/drawing/2014/main" id="{10EA01F3-F16B-629E-E754-47034C3EBB09}"/>
+              </a:ext>
+            </a:extLst>
+          </p:cNvPr>
+          <p:cNvSpPr>
+            <a:spLocks noGrp="1"/>
+          </p:cNvSpPr>
+          <p:nvPr>
+            <p:ph type="title"/>
+          </p:nvPr>
+        </p:nvSpPr>
+        <p:spPr>
+          <a:xfrm>
+            <a:off x="1251678" y="382385"/>
+            <a:ext cx="10178322" cy="928622"/>
+          </a:xfrm>
+        </p:spPr>
+        <p:txBody>
+          <a:bodyPr/>
+          <a:lstStyle/>
+          <a:p>
+            <a:pPr algn="ctr"/>
+            <a:r>
+              <a:rPr lang="en-US" dirty="0"/>
+              <a:t>Step 3</a:t>
+            </a:r>
+          </a:p>
+        </p:txBody>
+      </p:sp>
+      <p:sp>
+        <p:nvSpPr>
+          <p:cNvPr id="3" name="Content Placeholder 2">
+            <a:extLst>
+              <a:ext uri="{FF2B5EF4-FFF2-40B4-BE49-F238E27FC236}">
+                <a16:creationId xmlns:a16="http://schemas.microsoft.com/office/drawing/2014/main" id="{77415AFB-FBD4-2DE3-F2D3-5EA0B4B66C30}"/>
+              </a:ext>
+            </a:extLst>
+          </p:cNvPr>
+          <p:cNvSpPr>
+            <a:spLocks noGrp="1"/>
+          </p:cNvSpPr>
+          <p:nvPr>
+            <p:ph idx="1"/>
+          </p:nvPr>
+        </p:nvSpPr>
+        <p:spPr>
+          <a:xfrm>
+            <a:off x="1251679" y="1311007"/>
+            <a:ext cx="5766066" cy="5277080"/>
+          </a:xfrm>
+        </p:spPr>
+        <p:txBody>
+          <a:bodyPr>
+            <a:normAutofit/>
+          </a:bodyPr>
+          <a:lstStyle/>
+          <a:p>
+            <a:pPr marL="514350" indent="-514350">
+              <a:buFont typeface="+mj-lt"/>
+              <a:buAutoNum type="arabicPeriod"/>
+            </a:pPr>
+            <a:r>
+              <a:rPr lang="en-US" sz="2600" dirty="0"/>
+              <a:t>Find Task 3 in the manual and in code.</a:t>
+            </a:r>
+          </a:p>
+          <a:p>
+            <a:pPr marL="514350" indent="-514350">
+              <a:buFont typeface="+mj-lt"/>
+              <a:buAutoNum type="arabicPeriod"/>
+            </a:pPr>
+            <a:r>
+              <a:rPr lang="en-US" sz="2600" dirty="0"/>
+              <a:t>Add some spacing after the prompt to make the page more professional</a:t>
+            </a:r>
+          </a:p>
+          <a:p>
+            <a:pPr marL="0" indent="0">
+              <a:buNone/>
+            </a:pPr>
+            <a:endParaRPr lang="en-US" sz="2200" dirty="0"/>
+          </a:p>
+        </p:txBody>
+      </p:sp>
+      <p:sp>
+        <p:nvSpPr>
+          <p:cNvPr id="5" name="TextBox 4">
+            <a:extLst>
+              <a:ext uri="{FF2B5EF4-FFF2-40B4-BE49-F238E27FC236}">
+                <a16:creationId xmlns:a16="http://schemas.microsoft.com/office/drawing/2014/main" id="{12FDE0A4-9AD2-0F49-6353-FF9CFC3C8212}"/>
+              </a:ext>
+            </a:extLst>
+          </p:cNvPr>
+          <p:cNvSpPr txBox="1"/>
+          <p:nvPr/>
+        </p:nvSpPr>
+        <p:spPr>
+          <a:xfrm>
+            <a:off x="1653672" y="3523421"/>
+            <a:ext cx="5863156" cy="369332"/>
+          </a:xfrm>
+          <a:prstGeom prst="rect">
+            <a:avLst/>
+          </a:prstGeom>
+          <a:noFill/>
+        </p:spPr>
+        <p:txBody>
+          <a:bodyPr wrap="square">
+            <a:spAutoFit/>
+          </a:bodyPr>
+          <a:lstStyle/>
+          <a:p>
+            <a:pPr marL="0" indent="0">
+              <a:buNone/>
+            </a:pPr>
+            <a:r>
+              <a:rPr lang="en-US" sz="1800" dirty="0">
+                <a:solidFill>
+                  <a:schemeClr val="accent5">
+                    <a:lumMod val="75000"/>
+                  </a:schemeClr>
+                </a:solidFill>
+                <a:latin typeface="Menlo" panose="020B0609030804020204" pitchFamily="49" charset="0"/>
+                <a:ea typeface="Menlo" panose="020B0609030804020204" pitchFamily="49" charset="0"/>
+                <a:cs typeface="Menlo" panose="020B0609030804020204" pitchFamily="49" charset="0"/>
+              </a:rPr>
+              <a:t>&lt;h1 </a:t>
+            </a:r>
+            <a:r>
+              <a:rPr lang="en-US" sz="1800" b="1" dirty="0">
+                <a:solidFill>
+                  <a:schemeClr val="accent5">
+                    <a:lumMod val="75000"/>
+                  </a:schemeClr>
+                </a:solidFill>
+                <a:latin typeface="Menlo" panose="020B0609030804020204" pitchFamily="49" charset="0"/>
+                <a:ea typeface="Menlo" panose="020B0609030804020204" pitchFamily="49" charset="0"/>
+                <a:cs typeface="Menlo" panose="020B0609030804020204" pitchFamily="49" charset="0"/>
+              </a:rPr>
+              <a:t>class="</a:t>
+            </a:r>
+            <a:r>
+              <a:rPr lang="en-US" sz="1800" b="1" dirty="0" err="1">
+                <a:solidFill>
+                  <a:schemeClr val="accent5">
+                    <a:lumMod val="75000"/>
+                  </a:schemeClr>
+                </a:solidFill>
+                <a:latin typeface="Menlo" panose="020B0609030804020204" pitchFamily="49" charset="0"/>
+                <a:ea typeface="Menlo" panose="020B0609030804020204" pitchFamily="49" charset="0"/>
+                <a:cs typeface="Menlo" panose="020B0609030804020204" pitchFamily="49" charset="0"/>
+              </a:rPr>
+              <a:t>orbitron</a:t>
+            </a:r>
+            <a:r>
+              <a:rPr lang="en-US" sz="1800" b="1" dirty="0">
+                <a:solidFill>
+                  <a:schemeClr val="accent5">
+                    <a:lumMod val="75000"/>
+                  </a:schemeClr>
+                </a:solidFill>
+                <a:latin typeface="Menlo" panose="020B0609030804020204" pitchFamily="49" charset="0"/>
+                <a:ea typeface="Menlo" panose="020B0609030804020204" pitchFamily="49" charset="0"/>
+                <a:cs typeface="Menlo" panose="020B0609030804020204" pitchFamily="49" charset="0"/>
+              </a:rPr>
+              <a:t>-fancy"</a:t>
+            </a:r>
+            <a:r>
+              <a:rPr lang="en-US" sz="1800" dirty="0">
+                <a:solidFill>
+                  <a:schemeClr val="accent5">
+                    <a:lumMod val="75000"/>
+                  </a:schemeClr>
+                </a:solidFill>
+                <a:latin typeface="Menlo" panose="020B0609030804020204" pitchFamily="49" charset="0"/>
+                <a:ea typeface="Menlo" panose="020B0609030804020204" pitchFamily="49" charset="0"/>
+                <a:cs typeface="Menlo" panose="020B0609030804020204" pitchFamily="49" charset="0"/>
+              </a:rPr>
+              <a:t>&gt;</a:t>
+            </a:r>
+            <a:r>
+              <a:rPr lang="en-US" sz="1800" dirty="0" err="1">
+                <a:solidFill>
+                  <a:schemeClr val="accent5">
+                    <a:lumMod val="75000"/>
+                  </a:schemeClr>
+                </a:solidFill>
+                <a:latin typeface="Menlo" panose="020B0609030804020204" pitchFamily="49" charset="0"/>
+                <a:ea typeface="Menlo" panose="020B0609030804020204" pitchFamily="49" charset="0"/>
+                <a:cs typeface="Menlo" panose="020B0609030804020204" pitchFamily="49" charset="0"/>
+              </a:rPr>
+              <a:t>TigerGPT</a:t>
+            </a:r>
+            <a:r>
+              <a:rPr lang="en-US" sz="1800" dirty="0">
+                <a:solidFill>
+                  <a:schemeClr val="accent5">
+                    <a:lumMod val="75000"/>
+                  </a:schemeClr>
+                </a:solidFill>
+                <a:latin typeface="Menlo" panose="020B0609030804020204" pitchFamily="49" charset="0"/>
+                <a:ea typeface="Menlo" panose="020B0609030804020204" pitchFamily="49" charset="0"/>
+                <a:cs typeface="Menlo" panose="020B0609030804020204" pitchFamily="49" charset="0"/>
+              </a:rPr>
+              <a:t>&lt;/h1&gt;</a:t>
+            </a:r>
+          </a:p>
+        </p:txBody>
+      </p:sp>
+      <p:pic>
+        <p:nvPicPr>
+          <p:cNvPr id="6" name="Picture 5">
+            <a:extLst>
+              <a:ext uri="{FF2B5EF4-FFF2-40B4-BE49-F238E27FC236}">
+                <a16:creationId xmlns:a16="http://schemas.microsoft.com/office/drawing/2014/main" id="{E8E90F71-9529-24C3-7721-BD6A618919C4}"/>
+              </a:ext>
+            </a:extLst>
+          </p:cNvPr>
+          <p:cNvPicPr>
+            <a:picLocks noChangeAspect="1"/>
+          </p:cNvPicPr>
+          <p:nvPr/>
+        </p:nvPicPr>
+        <p:blipFill>
+          <a:blip r:embed="rId2"/>
+          <a:stretch>
+            <a:fillRect/>
+          </a:stretch>
+        </p:blipFill>
+        <p:spPr>
+          <a:xfrm>
+            <a:off x="7181485" y="3429000"/>
+            <a:ext cx="4562132" cy="2906150"/>
+          </a:xfrm>
+          <a:prstGeom prst="rect">
+            <a:avLst/>
+          </a:prstGeom>
+        </p:spPr>
+      </p:pic>
+    </p:spTree>
+    <p:extLst>
+      <p:ext uri="{BB962C8B-B14F-4D97-AF65-F5344CB8AC3E}">
+        <p14:creationId xmlns:p14="http://schemas.microsoft.com/office/powerpoint/2010/main" val="3499969774"/>
+      </p:ext>
+    </p:extLst>
+  </p:cSld>
+  <p:clrMapOvr>
+    <a:masterClrMapping/>
+  </p:clrMapOvr>
+</p:sld>
+</file>
+
+<file path=ppt/slides/slide11.xml><?xml version="1.0" encoding="utf-8"?>
+<p:sld xmlns:a="http://schemas.openxmlformats.org/drawingml/2006/main" xmlns:r="http://schemas.openxmlformats.org/officeDocument/2006/relationships" xmlns:p="http://schemas.openxmlformats.org/presentationml/2006/main">
+  <p:cSld>
+    <p:spTree>
+      <p:nvGrpSpPr>
+        <p:cNvPr id="1" name=""/>
+        <p:cNvGrpSpPr/>
+        <p:nvPr/>
+      </p:nvGrpSpPr>
+      <p:grpSpPr>
+        <a:xfrm>
+          <a:off x="0" y="0"/>
+          <a:ext cx="0" cy="0"/>
+          <a:chOff x="0" y="0"/>
+          <a:chExt cx="0" cy="0"/>
+        </a:xfrm>
+      </p:grpSpPr>
+      <p:sp>
+        <p:nvSpPr>
+          <p:cNvPr id="2" name="Title 1">
+            <a:extLst>
+              <a:ext uri="{FF2B5EF4-FFF2-40B4-BE49-F238E27FC236}">
+                <a16:creationId xmlns:a16="http://schemas.microsoft.com/office/drawing/2014/main" id="{10EA01F3-F16B-629E-E754-47034C3EBB09}"/>
+              </a:ext>
+            </a:extLst>
+          </p:cNvPr>
+          <p:cNvSpPr>
+            <a:spLocks noGrp="1"/>
+          </p:cNvSpPr>
+          <p:nvPr>
+            <p:ph type="title"/>
+          </p:nvPr>
+        </p:nvSpPr>
+        <p:spPr>
+          <a:xfrm>
+            <a:off x="1251678" y="382385"/>
+            <a:ext cx="10178322" cy="928622"/>
+          </a:xfrm>
+        </p:spPr>
+        <p:txBody>
+          <a:bodyPr/>
+          <a:lstStyle/>
+          <a:p>
+            <a:pPr algn="ctr"/>
+            <a:r>
+              <a:rPr lang="en-US" dirty="0"/>
+              <a:t>The End</a:t>
+            </a:r>
+          </a:p>
+        </p:txBody>
+      </p:sp>
+      <p:sp>
+        <p:nvSpPr>
+          <p:cNvPr id="3" name="Content Placeholder 2">
+            <a:extLst>
+              <a:ext uri="{FF2B5EF4-FFF2-40B4-BE49-F238E27FC236}">
+                <a16:creationId xmlns:a16="http://schemas.microsoft.com/office/drawing/2014/main" id="{77415AFB-FBD4-2DE3-F2D3-5EA0B4B66C30}"/>
+              </a:ext>
+            </a:extLst>
+          </p:cNvPr>
+          <p:cNvSpPr>
+            <a:spLocks noGrp="1"/>
+          </p:cNvSpPr>
+          <p:nvPr>
+            <p:ph idx="1"/>
+          </p:nvPr>
+        </p:nvSpPr>
+        <p:spPr>
+          <a:xfrm>
+            <a:off x="1251679" y="1311007"/>
+            <a:ext cx="10448234" cy="2423711"/>
+          </a:xfrm>
+        </p:spPr>
+        <p:txBody>
+          <a:bodyPr>
+            <a:normAutofit/>
+          </a:bodyPr>
+          <a:lstStyle/>
+          <a:p>
+            <a:r>
+              <a:rPr lang="en-US" sz="2600" dirty="0"/>
+              <a:t>Time is up. Go ahead and type a question into the </a:t>
+            </a:r>
+            <a:r>
+              <a:rPr lang="en-US" sz="2600" dirty="0" err="1"/>
+              <a:t>TigerChat</a:t>
+            </a:r>
+            <a:r>
+              <a:rPr lang="en-US" sz="2600" dirty="0"/>
+              <a:t> prompt.</a:t>
+            </a:r>
+          </a:p>
+          <a:p>
+            <a:pPr marL="295275" indent="-295275">
+              <a:buNone/>
+            </a:pPr>
+            <a:r>
+              <a:rPr lang="en-US" sz="2600" dirty="0"/>
+              <a:t>	Example: </a:t>
+            </a:r>
+            <a:r>
+              <a:rPr lang="en-US" sz="2600" i="1"/>
+              <a:t>Write an </a:t>
+            </a:r>
+            <a:r>
+              <a:rPr lang="en-US" sz="2600" i="1" dirty="0"/>
+              <a:t>eight-line poem about the first year of college.</a:t>
+            </a:r>
+            <a:endParaRPr lang="en-US" sz="2600" dirty="0"/>
+          </a:p>
+          <a:p>
+            <a:pPr marL="295275" indent="-295275">
+              <a:buFont typeface="+mj-lt"/>
+              <a:buAutoNum type="arabicPeriod"/>
+            </a:pPr>
+            <a:endParaRPr lang="en-US" sz="2600" dirty="0"/>
+          </a:p>
+          <a:p>
+            <a:pPr marL="295275" indent="-285750">
+              <a:spcBef>
+                <a:spcPts val="1000"/>
+              </a:spcBef>
+              <a:buNone/>
+            </a:pPr>
+            <a:r>
+              <a:rPr lang="en-US" sz="2600" dirty="0"/>
+              <a:t>	Did you get a good answer?</a:t>
+            </a:r>
+          </a:p>
+          <a:p>
+            <a:pPr marL="0" indent="0">
+              <a:buNone/>
+            </a:pPr>
+            <a:endParaRPr lang="en-US" sz="2200" dirty="0"/>
+          </a:p>
+        </p:txBody>
+      </p:sp>
+      <p:sp>
+        <p:nvSpPr>
+          <p:cNvPr id="6" name="TextBox 5">
+            <a:extLst>
+              <a:ext uri="{FF2B5EF4-FFF2-40B4-BE49-F238E27FC236}">
+                <a16:creationId xmlns:a16="http://schemas.microsoft.com/office/drawing/2014/main" id="{AA7AF900-7FBF-25BB-A786-7B9658BE64E5}"/>
+              </a:ext>
+            </a:extLst>
+          </p:cNvPr>
+          <p:cNvSpPr txBox="1"/>
+          <p:nvPr/>
+        </p:nvSpPr>
+        <p:spPr>
+          <a:xfrm>
+            <a:off x="2733447" y="4183522"/>
+            <a:ext cx="7214784" cy="1569660"/>
+          </a:xfrm>
+          <a:prstGeom prst="rect">
+            <a:avLst/>
+          </a:prstGeom>
+          <a:noFill/>
+        </p:spPr>
+        <p:txBody>
+          <a:bodyPr wrap="square">
+            <a:spAutoFit/>
+          </a:bodyPr>
+          <a:lstStyle/>
+          <a:p>
+            <a:pPr algn="ctr"/>
+            <a:r>
+              <a:rPr lang="en-US" sz="3200" dirty="0">
+                <a:solidFill>
+                  <a:schemeClr val="accent5">
+                    <a:lumMod val="75000"/>
+                  </a:schemeClr>
+                </a:solidFill>
+                <a:latin typeface="Corbel" panose="020B0503020204020204" pitchFamily="34" charset="0"/>
+              </a:rPr>
+              <a:t>Thanks for participating. </a:t>
+            </a:r>
+            <a:br>
+              <a:rPr lang="en-US" sz="3200" dirty="0">
+                <a:solidFill>
+                  <a:schemeClr val="accent5">
+                    <a:lumMod val="75000"/>
+                  </a:schemeClr>
+                </a:solidFill>
+                <a:latin typeface="Corbel" panose="020B0503020204020204" pitchFamily="34" charset="0"/>
+              </a:rPr>
+            </a:br>
+            <a:r>
+              <a:rPr lang="en-US" sz="3200" dirty="0">
+                <a:solidFill>
+                  <a:schemeClr val="accent5">
+                    <a:lumMod val="75000"/>
+                  </a:schemeClr>
+                </a:solidFill>
+                <a:latin typeface="Corbel" panose="020B0503020204020204" pitchFamily="34" charset="0"/>
+              </a:rPr>
+              <a:t>Join us on Wednesday for an </a:t>
+            </a:r>
+            <a:r>
+              <a:rPr lang="en-US" sz="3200" i="1" dirty="0">
+                <a:solidFill>
+                  <a:schemeClr val="accent5">
+                    <a:lumMod val="75000"/>
+                  </a:schemeClr>
+                </a:solidFill>
+                <a:latin typeface="Corbel" panose="020B0503020204020204" pitchFamily="34" charset="0"/>
+              </a:rPr>
+              <a:t>extended</a:t>
+            </a:r>
+            <a:r>
+              <a:rPr lang="en-US" sz="3200" dirty="0">
+                <a:solidFill>
+                  <a:schemeClr val="accent5">
+                    <a:lumMod val="75000"/>
+                  </a:schemeClr>
+                </a:solidFill>
+                <a:latin typeface="Corbel" panose="020B0503020204020204" pitchFamily="34" charset="0"/>
+              </a:rPr>
+              <a:t> web development experience.</a:t>
+            </a:r>
+          </a:p>
+        </p:txBody>
+      </p:sp>
+    </p:spTree>
+    <p:extLst>
+      <p:ext uri="{BB962C8B-B14F-4D97-AF65-F5344CB8AC3E}">
+        <p14:creationId xmlns:p14="http://schemas.microsoft.com/office/powerpoint/2010/main" val="1254606585"/>
+      </p:ext>
+    </p:extLst>
+  </p:cSld>
+  <p:clrMapOvr>
+    <a:masterClrMapping/>
+  </p:clrMapOvr>
+</p:sld>
+</file>
+
 <file path=ppt/slides/slide2.xml><?xml version="1.0" encoding="utf-8"?>
 <p:sld xmlns:a="http://schemas.openxmlformats.org/drawingml/2006/main" xmlns:r="http://schemas.openxmlformats.org/officeDocument/2006/relationships" xmlns:p="http://schemas.openxmlformats.org/presentationml/2006/main">
   <p:cSld>
@@ -7022,7 +7535,7 @@
             </a:pPr>
             <a:r>
               <a:rPr lang="en-US" sz="2800" dirty="0"/>
-              <a:t>Sort of – focused on editing some HTML, the language used to layout webpages.</a:t>
+              <a:t>You will be editing some HTML, the language used to layout webpages.</a:t>
             </a:r>
           </a:p>
           <a:p>
@@ -7034,7 +7547,15 @@
             </a:pPr>
             <a:r>
               <a:rPr lang="en-US" sz="2800" dirty="0"/>
-              <a:t>Hopefully, it will be a </a:t>
+              <a:t>This will </a:t>
+            </a:r>
+            <a:r>
+              <a:rPr lang="en-US" sz="2800" dirty="0" err="1"/>
+              <a:t>will</a:t>
+            </a:r>
+            <a:r>
+              <a:rPr lang="en-US" sz="2800" dirty="0"/>
+              <a:t> be a </a:t>
             </a:r>
             <a:r>
               <a:rPr lang="en-US" sz="2800" i="1" dirty="0"/>
@@ -7171,7 +7692,7 @@
 </file>
 
 <file path=ppt/slides/slide3.xml><?xml version="1.0" encoding="utf-8"?>
-<p:sld xmlns:a="http://schemas.openxmlformats.org/drawingml/2006/main" xmlns:r="http://schemas.openxmlformats.org/officeDocument/2006/relationships" xmlns:p="http://schemas.openxmlformats.org/presentationml/2006/main">
+<p:sld xmlns:a="http://schemas.openxmlformats.org/drawingml/2006/main" xmlns:r="http://schemas.openxmlformats.org/officeDocument/2006/relationships" xmlns:p="http://schemas.openxmlformats.org/presentationml/2006/main" show="0">
   <p:cSld>
     <p:spTree>
       <p:nvGrpSpPr>
@@ -7428,7 +7949,7 @@
 </file>
 
 <file path=ppt/slides/slide4.xml><?xml version="1.0" encoding="utf-8"?>
-<p:sld xmlns:a="http://schemas.openxmlformats.org/drawingml/2006/main" xmlns:r="http://schemas.openxmlformats.org/officeDocument/2006/relationships" xmlns:p="http://schemas.openxmlformats.org/presentationml/2006/main">
+<p:sld xmlns:a="http://schemas.openxmlformats.org/drawingml/2006/main" xmlns:r="http://schemas.openxmlformats.org/officeDocument/2006/relationships" xmlns:p="http://schemas.openxmlformats.org/presentationml/2006/main" show="0">
   <p:cSld>
     <p:spTree>
       <p:nvGrpSpPr>
@@ -7672,6 +8193,341 @@
             </a:pPr>
             <a:r>
               <a:rPr lang="en-US" sz="2600" dirty="0"/>
+              <a:t>Find Task 1 in your manual and in code.</a:t>
+            </a:r>
+          </a:p>
+          <a:p>
+            <a:pPr marL="295275" indent="-295275">
+              <a:buFont typeface="+mj-lt"/>
+              <a:buAutoNum type="arabicPeriod"/>
+            </a:pPr>
+            <a:r>
+              <a:rPr lang="en-US" sz="2600" dirty="0"/>
+              <a:t>Let’s add instructions for the user to follow. Currently it’s just a blank orange page.</a:t>
+            </a:r>
+          </a:p>
+          <a:p>
+            <a:pPr marL="0" indent="0">
+              <a:buNone/>
+            </a:pPr>
+            <a:endParaRPr lang="en-US" sz="2200" dirty="0"/>
+          </a:p>
+        </p:txBody>
+      </p:sp>
+      <p:sp>
+        <p:nvSpPr>
+          <p:cNvPr id="5" name="TextBox 4">
+            <a:extLst>
+              <a:ext uri="{FF2B5EF4-FFF2-40B4-BE49-F238E27FC236}">
+                <a16:creationId xmlns:a16="http://schemas.microsoft.com/office/drawing/2014/main" id="{AE8BE113-D4B5-677C-2525-BE40C1F05C7B}"/>
+              </a:ext>
+            </a:extLst>
+          </p:cNvPr>
+          <p:cNvSpPr txBox="1"/>
+          <p:nvPr/>
+        </p:nvSpPr>
+        <p:spPr>
+          <a:xfrm>
+            <a:off x="1586428" y="3429000"/>
+            <a:ext cx="5728772" cy="2396938"/>
+          </a:xfrm>
+          <a:prstGeom prst="rect">
+            <a:avLst/>
+          </a:prstGeom>
+          <a:noFill/>
+        </p:spPr>
+        <p:txBody>
+          <a:bodyPr wrap="square">
+            <a:spAutoFit/>
+          </a:bodyPr>
+          <a:lstStyle/>
+          <a:p>
+            <a:pPr marL="0" indent="0">
+              <a:lnSpc>
+                <a:spcPct val="120000"/>
+              </a:lnSpc>
+              <a:buNone/>
+            </a:pPr>
+            <a:r>
+              <a:rPr lang="en-US" sz="1800" dirty="0">
+                <a:solidFill>
+                  <a:schemeClr val="accent5">
+                    <a:lumMod val="75000"/>
+                  </a:schemeClr>
+                </a:solidFill>
+                <a:latin typeface="Menlo" panose="020B0609030804020204" pitchFamily="49" charset="0"/>
+                <a:ea typeface="Menlo" panose="020B0609030804020204" pitchFamily="49" charset="0"/>
+                <a:cs typeface="Menlo" panose="020B0609030804020204" pitchFamily="49" charset="0"/>
+              </a:rPr>
+              <a:t>&lt;div&gt;</a:t>
+            </a:r>
+          </a:p>
+          <a:p>
+            <a:pPr marL="0" indent="0">
+              <a:lnSpc>
+                <a:spcPct val="120000"/>
+              </a:lnSpc>
+              <a:buNone/>
+            </a:pPr>
+            <a:r>
+              <a:rPr lang="en-US" dirty="0">
+                <a:solidFill>
+                  <a:schemeClr val="accent5">
+                    <a:lumMod val="75000"/>
+                  </a:schemeClr>
+                </a:solidFill>
+                <a:latin typeface="Menlo" panose="020B0609030804020204" pitchFamily="49" charset="0"/>
+                <a:ea typeface="Menlo" panose="020B0609030804020204" pitchFamily="49" charset="0"/>
+                <a:cs typeface="Menlo" panose="020B0609030804020204" pitchFamily="49" charset="0"/>
+              </a:rPr>
+              <a:t>	&lt;ol&gt;</a:t>
+            </a:r>
+          </a:p>
+          <a:p>
+            <a:pPr marL="0" indent="0">
+              <a:lnSpc>
+                <a:spcPct val="120000"/>
+              </a:lnSpc>
+              <a:buNone/>
+            </a:pPr>
+            <a:r>
+              <a:rPr lang="en-US" dirty="0">
+                <a:solidFill>
+                  <a:schemeClr val="accent5">
+                    <a:lumMod val="75000"/>
+                  </a:schemeClr>
+                </a:solidFill>
+                <a:latin typeface="Menlo" panose="020B0609030804020204" pitchFamily="49" charset="0"/>
+                <a:ea typeface="Menlo" panose="020B0609030804020204" pitchFamily="49" charset="0"/>
+                <a:cs typeface="Menlo" panose="020B0609030804020204" pitchFamily="49" charset="0"/>
+              </a:rPr>
+              <a:t>		&lt;li&gt;Step 1: Click in the field at the bottom.&lt;/li&gt;</a:t>
+            </a:r>
+          </a:p>
+          <a:p>
+            <a:pPr marL="0" indent="0">
+              <a:lnSpc>
+                <a:spcPct val="120000"/>
+              </a:lnSpc>
+              <a:buNone/>
+            </a:pPr>
+            <a:r>
+              <a:rPr lang="en-US" dirty="0">
+                <a:solidFill>
+                  <a:schemeClr val="accent5">
+                    <a:lumMod val="75000"/>
+                  </a:schemeClr>
+                </a:solidFill>
+                <a:latin typeface="Menlo" panose="020B0609030804020204" pitchFamily="49" charset="0"/>
+                <a:ea typeface="Menlo" panose="020B0609030804020204" pitchFamily="49" charset="0"/>
+                <a:cs typeface="Menlo" panose="020B0609030804020204" pitchFamily="49" charset="0"/>
+              </a:rPr>
+              <a:t>		&lt;li&gt;Step 2: Type in a question.&lt;/li&gt;</a:t>
+            </a:r>
+          </a:p>
+          <a:p>
+            <a:pPr marL="0" indent="0">
+              <a:lnSpc>
+                <a:spcPct val="120000"/>
+              </a:lnSpc>
+              <a:buNone/>
+            </a:pPr>
+            <a:r>
+              <a:rPr lang="en-US" dirty="0">
+                <a:solidFill>
+                  <a:schemeClr val="accent5">
+                    <a:lumMod val="75000"/>
+                  </a:schemeClr>
+                </a:solidFill>
+                <a:latin typeface="Menlo" panose="020B0609030804020204" pitchFamily="49" charset="0"/>
+                <a:ea typeface="Menlo" panose="020B0609030804020204" pitchFamily="49" charset="0"/>
+                <a:cs typeface="Menlo" panose="020B0609030804020204" pitchFamily="49" charset="0"/>
+              </a:rPr>
+              <a:t>		&lt;li&gt;Step 3: Press RETURN/Enter…Send&lt;/li&gt;</a:t>
+            </a:r>
+          </a:p>
+          <a:p>
+            <a:pPr marL="0" indent="0">
+              <a:lnSpc>
+                <a:spcPct val="120000"/>
+              </a:lnSpc>
+              <a:buNone/>
+            </a:pPr>
+            <a:r>
+              <a:rPr lang="en-US" sz="1800" dirty="0">
+                <a:solidFill>
+                  <a:schemeClr val="accent5">
+                    <a:lumMod val="75000"/>
+                  </a:schemeClr>
+                </a:solidFill>
+                <a:latin typeface="Menlo" panose="020B0609030804020204" pitchFamily="49" charset="0"/>
+                <a:ea typeface="Menlo" panose="020B0609030804020204" pitchFamily="49" charset="0"/>
+                <a:cs typeface="Menlo" panose="020B0609030804020204" pitchFamily="49" charset="0"/>
+              </a:rPr>
+              <a:t>	&lt;/ol&gt;</a:t>
+            </a:r>
+          </a:p>
+          <a:p>
+            <a:pPr marL="0" indent="0">
+              <a:lnSpc>
+                <a:spcPct val="120000"/>
+              </a:lnSpc>
+              <a:buNone/>
+            </a:pPr>
+            <a:r>
+              <a:rPr lang="en-US" dirty="0">
+                <a:solidFill>
+                  <a:schemeClr val="accent5">
+                    <a:lumMod val="75000"/>
+                  </a:schemeClr>
+                </a:solidFill>
+                <a:latin typeface="Menlo" panose="020B0609030804020204" pitchFamily="49" charset="0"/>
+                <a:ea typeface="Menlo" panose="020B0609030804020204" pitchFamily="49" charset="0"/>
+                <a:cs typeface="Menlo" panose="020B0609030804020204" pitchFamily="49" charset="0"/>
+              </a:rPr>
+              <a:t>&lt;/div&gt;</a:t>
+            </a:r>
+            <a:endParaRPr lang="en-US" sz="1800" dirty="0">
+              <a:solidFill>
+                <a:schemeClr val="accent5">
+                  <a:lumMod val="75000"/>
+                </a:schemeClr>
+              </a:solidFill>
+              <a:latin typeface="Menlo" panose="020B0609030804020204" pitchFamily="49" charset="0"/>
+              <a:ea typeface="Menlo" panose="020B0609030804020204" pitchFamily="49" charset="0"/>
+              <a:cs typeface="Menlo" panose="020B0609030804020204" pitchFamily="49" charset="0"/>
+            </a:endParaRPr>
+          </a:p>
+        </p:txBody>
+      </p:sp>
+      <p:pic>
+        <p:nvPicPr>
+          <p:cNvPr id="8" name="Picture 7">
+            <a:extLst>
+              <a:ext uri="{FF2B5EF4-FFF2-40B4-BE49-F238E27FC236}">
+                <a16:creationId xmlns:a16="http://schemas.microsoft.com/office/drawing/2014/main" id="{3B0B44C8-345B-5D4E-23F9-3ABB869D4BAC}"/>
+              </a:ext>
+            </a:extLst>
+          </p:cNvPr>
+          <p:cNvPicPr>
+            <a:picLocks noChangeAspect="1"/>
+          </p:cNvPicPr>
+          <p:nvPr/>
+        </p:nvPicPr>
+        <p:blipFill>
+          <a:blip r:embed="rId2"/>
+          <a:stretch>
+            <a:fillRect/>
+          </a:stretch>
+        </p:blipFill>
+        <p:spPr>
+          <a:xfrm>
+            <a:off x="6918593" y="3096031"/>
+            <a:ext cx="4869456" cy="2702338"/>
+          </a:xfrm>
+          <a:prstGeom prst="rect">
+            <a:avLst/>
+          </a:prstGeom>
+        </p:spPr>
+      </p:pic>
+    </p:spTree>
+    <p:extLst>
+      <p:ext uri="{BB962C8B-B14F-4D97-AF65-F5344CB8AC3E}">
+        <p14:creationId xmlns:p14="http://schemas.microsoft.com/office/powerpoint/2010/main" val="4152426"/>
+      </p:ext>
+    </p:extLst>
+  </p:cSld>
+  <p:clrMapOvr>
+    <a:masterClrMapping/>
+  </p:clrMapOvr>
+</p:sld>
+</file>
+
+<file path=ppt/slides/slide6.xml><?xml version="1.0" encoding="utf-8"?>
+<p:sld xmlns:a="http://schemas.openxmlformats.org/drawingml/2006/main" xmlns:r="http://schemas.openxmlformats.org/officeDocument/2006/relationships" xmlns:p="http://schemas.openxmlformats.org/presentationml/2006/main" show="0">
+  <p:cSld>
+    <p:spTree>
+      <p:nvGrpSpPr>
+        <p:cNvPr id="1" name=""/>
+        <p:cNvGrpSpPr/>
+        <p:nvPr/>
+      </p:nvGrpSpPr>
+      <p:grpSpPr>
+        <a:xfrm>
+          <a:off x="0" y="0"/>
+          <a:ext cx="0" cy="0"/>
+          <a:chOff x="0" y="0"/>
+          <a:chExt cx="0" cy="0"/>
+        </a:xfrm>
+      </p:grpSpPr>
+      <p:sp>
+        <p:nvSpPr>
+          <p:cNvPr id="2" name="Title 1">
+            <a:extLst>
+              <a:ext uri="{FF2B5EF4-FFF2-40B4-BE49-F238E27FC236}">
+                <a16:creationId xmlns:a16="http://schemas.microsoft.com/office/drawing/2014/main" id="{10EA01F3-F16B-629E-E754-47034C3EBB09}"/>
+              </a:ext>
+            </a:extLst>
+          </p:cNvPr>
+          <p:cNvSpPr>
+            <a:spLocks noGrp="1"/>
+          </p:cNvSpPr>
+          <p:nvPr>
+            <p:ph type="title"/>
+          </p:nvPr>
+        </p:nvSpPr>
+        <p:spPr>
+          <a:xfrm>
+            <a:off x="1251678" y="382385"/>
+            <a:ext cx="10178322" cy="928622"/>
+          </a:xfrm>
+        </p:spPr>
+        <p:txBody>
+          <a:bodyPr/>
+          <a:lstStyle/>
+          <a:p>
+            <a:pPr algn="ctr"/>
+            <a:r>
+              <a:rPr lang="en-US" dirty="0"/>
+              <a:t>Step 1</a:t>
+            </a:r>
+          </a:p>
+        </p:txBody>
+      </p:sp>
+      <p:sp>
+        <p:nvSpPr>
+          <p:cNvPr id="3" name="Content Placeholder 2">
+            <a:extLst>
+              <a:ext uri="{FF2B5EF4-FFF2-40B4-BE49-F238E27FC236}">
+                <a16:creationId xmlns:a16="http://schemas.microsoft.com/office/drawing/2014/main" id="{77415AFB-FBD4-2DE3-F2D3-5EA0B4B66C30}"/>
+              </a:ext>
+            </a:extLst>
+          </p:cNvPr>
+          <p:cNvSpPr>
+            <a:spLocks noGrp="1"/>
+          </p:cNvSpPr>
+          <p:nvPr>
+            <p:ph idx="1"/>
+          </p:nvPr>
+        </p:nvSpPr>
+        <p:spPr>
+          <a:xfrm>
+            <a:off x="1251678" y="1311007"/>
+            <a:ext cx="5964369" cy="5277080"/>
+          </a:xfrm>
+        </p:spPr>
+        <p:txBody>
+          <a:bodyPr>
+            <a:normAutofit/>
+          </a:bodyPr>
+          <a:lstStyle/>
+          <a:p>
+            <a:pPr marL="295275" indent="-295275">
+              <a:buFont typeface="+mj-lt"/>
+              <a:buAutoNum type="arabicPeriod"/>
+            </a:pPr>
+            <a:r>
+              <a:rPr lang="en-US" sz="2600" dirty="0"/>
               <a:t>Change the page background color to "RIT orange". Search for "Task 2..." and add the 'class=' part to the &lt;body&gt; element as shown: </a:t>
             </a:r>
           </a:p>
@@ -7857,7 +8713,7 @@
     </p:spTree>
     <p:extLst>
       <p:ext uri="{BB962C8B-B14F-4D97-AF65-F5344CB8AC3E}">
-        <p14:creationId xmlns:p14="http://schemas.microsoft.com/office/powerpoint/2010/main" val="4152426"/>
+        <p14:creationId xmlns:p14="http://schemas.microsoft.com/office/powerpoint/2010/main" val="3626312273"/>
       </p:ext>
     </p:extLst>
   </p:cSld>
@@ -7867,8 +8723,294 @@
 </p:sld>
 </file>
 
-<file path=ppt/slides/slide6.xml><?xml version="1.0" encoding="utf-8"?>
+<file path=ppt/slides/slide7.xml><?xml version="1.0" encoding="utf-8"?>
 <p:sld xmlns:a="http://schemas.openxmlformats.org/drawingml/2006/main" xmlns:r="http://schemas.openxmlformats.org/officeDocument/2006/relationships" xmlns:p="http://schemas.openxmlformats.org/presentationml/2006/main">
+  <p:cSld>
+    <p:spTree>
+      <p:nvGrpSpPr>
+        <p:cNvPr id="1" name=""/>
+        <p:cNvGrpSpPr/>
+        <p:nvPr/>
+      </p:nvGrpSpPr>
+      <p:grpSpPr>
+        <a:xfrm>
+          <a:off x="0" y="0"/>
+          <a:ext cx="0" cy="0"/>
+          <a:chOff x="0" y="0"/>
+          <a:chExt cx="0" cy="0"/>
+        </a:xfrm>
+      </p:grpSpPr>
+      <p:sp>
+        <p:nvSpPr>
+          <p:cNvPr id="2" name="Title 1">
+            <a:extLst>
+              <a:ext uri="{FF2B5EF4-FFF2-40B4-BE49-F238E27FC236}">
+                <a16:creationId xmlns:a16="http://schemas.microsoft.com/office/drawing/2014/main" id="{10EA01F3-F16B-629E-E754-47034C3EBB09}"/>
+              </a:ext>
+            </a:extLst>
+          </p:cNvPr>
+          <p:cNvSpPr>
+            <a:spLocks noGrp="1"/>
+          </p:cNvSpPr>
+          <p:nvPr>
+            <p:ph type="title"/>
+          </p:nvPr>
+        </p:nvSpPr>
+        <p:spPr>
+          <a:xfrm>
+            <a:off x="1251678" y="382385"/>
+            <a:ext cx="10178322" cy="928622"/>
+          </a:xfrm>
+        </p:spPr>
+        <p:txBody>
+          <a:bodyPr/>
+          <a:lstStyle/>
+          <a:p>
+            <a:pPr algn="ctr"/>
+            <a:r>
+              <a:rPr lang="en-US" dirty="0"/>
+              <a:t>Step 2</a:t>
+            </a:r>
+          </a:p>
+        </p:txBody>
+      </p:sp>
+      <p:sp>
+        <p:nvSpPr>
+          <p:cNvPr id="3" name="Content Placeholder 2">
+            <a:extLst>
+              <a:ext uri="{FF2B5EF4-FFF2-40B4-BE49-F238E27FC236}">
+                <a16:creationId xmlns:a16="http://schemas.microsoft.com/office/drawing/2014/main" id="{77415AFB-FBD4-2DE3-F2D3-5EA0B4B66C30}"/>
+              </a:ext>
+            </a:extLst>
+          </p:cNvPr>
+          <p:cNvSpPr>
+            <a:spLocks noGrp="1"/>
+          </p:cNvSpPr>
+          <p:nvPr>
+            <p:ph idx="1"/>
+          </p:nvPr>
+        </p:nvSpPr>
+        <p:spPr>
+          <a:xfrm>
+            <a:off x="1251679" y="1311007"/>
+            <a:ext cx="5766066" cy="5277080"/>
+          </a:xfrm>
+        </p:spPr>
+        <p:txBody>
+          <a:bodyPr>
+            <a:normAutofit/>
+          </a:bodyPr>
+          <a:lstStyle/>
+          <a:p>
+            <a:pPr marL="514350" indent="-514350">
+              <a:buFont typeface="+mj-lt"/>
+              <a:buAutoNum type="arabicPeriod"/>
+            </a:pPr>
+            <a:r>
+              <a:rPr lang="en-US" sz="2600" dirty="0"/>
+              <a:t>Find Task 2 in your manual and in code.</a:t>
+            </a:r>
+          </a:p>
+          <a:p>
+            <a:pPr marL="514350" indent="-514350">
+              <a:buFont typeface="+mj-lt"/>
+              <a:buAutoNum type="arabicPeriod"/>
+            </a:pPr>
+            <a:r>
+              <a:rPr lang="en-US" sz="2600" dirty="0"/>
+              <a:t>Add the RIT Tiger Logo</a:t>
+            </a:r>
+          </a:p>
+          <a:p>
+            <a:pPr marL="0" indent="0">
+              <a:buNone/>
+            </a:pPr>
+            <a:endParaRPr lang="en-US" sz="2200" dirty="0"/>
+          </a:p>
+        </p:txBody>
+      </p:sp>
+      <p:sp>
+        <p:nvSpPr>
+          <p:cNvPr id="5" name="TextBox 4">
+            <a:extLst>
+              <a:ext uri="{FF2B5EF4-FFF2-40B4-BE49-F238E27FC236}">
+                <a16:creationId xmlns:a16="http://schemas.microsoft.com/office/drawing/2014/main" id="{12FDE0A4-9AD2-0F49-6353-FF9CFC3C8212}"/>
+              </a:ext>
+            </a:extLst>
+          </p:cNvPr>
+          <p:cNvSpPr txBox="1"/>
+          <p:nvPr/>
+        </p:nvSpPr>
+        <p:spPr>
+          <a:xfrm>
+            <a:off x="1595263" y="3949547"/>
+            <a:ext cx="5422482" cy="734945"/>
+          </a:xfrm>
+          <a:prstGeom prst="rect">
+            <a:avLst/>
+          </a:prstGeom>
+          <a:noFill/>
+        </p:spPr>
+        <p:txBody>
+          <a:bodyPr wrap="square">
+            <a:spAutoFit/>
+          </a:bodyPr>
+          <a:lstStyle/>
+          <a:p>
+            <a:pPr>
+              <a:lnSpc>
+                <a:spcPct val="120000"/>
+              </a:lnSpc>
+            </a:pPr>
+            <a:r>
+              <a:rPr lang="en-US" dirty="0">
+                <a:solidFill>
+                  <a:schemeClr val="accent5">
+                    <a:lumMod val="75000"/>
+                  </a:schemeClr>
+                </a:solidFill>
+                <a:latin typeface="Menlo" panose="020B0609030804020204" pitchFamily="49" charset="0"/>
+                <a:ea typeface="Menlo" panose="020B0609030804020204" pitchFamily="49" charset="0"/>
+                <a:cs typeface="Menlo" panose="020B0609030804020204" pitchFamily="49" charset="0"/>
+              </a:rPr>
+              <a:t>&lt;</a:t>
+            </a:r>
+            <a:r>
+              <a:rPr lang="en-US" dirty="0" err="1">
+                <a:solidFill>
+                  <a:schemeClr val="accent5">
+                    <a:lumMod val="75000"/>
+                  </a:schemeClr>
+                </a:solidFill>
+                <a:latin typeface="Menlo" panose="020B0609030804020204" pitchFamily="49" charset="0"/>
+                <a:ea typeface="Menlo" panose="020B0609030804020204" pitchFamily="49" charset="0"/>
+                <a:cs typeface="Menlo" panose="020B0609030804020204" pitchFamily="49" charset="0"/>
+              </a:rPr>
+              <a:t>img</a:t>
+            </a:r>
+            <a:r>
+              <a:rPr lang="en-US" dirty="0">
+                <a:solidFill>
+                  <a:schemeClr val="accent5">
+                    <a:lumMod val="75000"/>
+                  </a:schemeClr>
+                </a:solidFill>
+                <a:latin typeface="Menlo" panose="020B0609030804020204" pitchFamily="49" charset="0"/>
+                <a:ea typeface="Menlo" panose="020B0609030804020204" pitchFamily="49" charset="0"/>
+                <a:cs typeface="Menlo" panose="020B0609030804020204" pitchFamily="49" charset="0"/>
+              </a:rPr>
+              <a:t> </a:t>
+            </a:r>
+            <a:r>
+              <a:rPr lang="en-US" dirty="0" err="1">
+                <a:solidFill>
+                  <a:schemeClr val="accent5">
+                    <a:lumMod val="75000"/>
+                  </a:schemeClr>
+                </a:solidFill>
+                <a:latin typeface="Menlo" panose="020B0609030804020204" pitchFamily="49" charset="0"/>
+                <a:ea typeface="Menlo" panose="020B0609030804020204" pitchFamily="49" charset="0"/>
+                <a:cs typeface="Menlo" panose="020B0609030804020204" pitchFamily="49" charset="0"/>
+              </a:rPr>
+              <a:t>src</a:t>
+            </a:r>
+            <a:r>
+              <a:rPr lang="en-US" dirty="0">
+                <a:solidFill>
+                  <a:schemeClr val="accent5">
+                    <a:lumMod val="75000"/>
+                  </a:schemeClr>
+                </a:solidFill>
+                <a:latin typeface="Menlo" panose="020B0609030804020204" pitchFamily="49" charset="0"/>
+                <a:ea typeface="Menlo" panose="020B0609030804020204" pitchFamily="49" charset="0"/>
+                <a:cs typeface="Menlo" panose="020B0609030804020204" pitchFamily="49" charset="0"/>
+              </a:rPr>
+              <a:t>="</a:t>
+            </a:r>
+            <a:r>
+              <a:rPr lang="en-US" dirty="0" err="1">
+                <a:solidFill>
+                  <a:schemeClr val="accent5">
+                    <a:lumMod val="75000"/>
+                  </a:schemeClr>
+                </a:solidFill>
+                <a:latin typeface="Menlo" panose="020B0609030804020204" pitchFamily="49" charset="0"/>
+                <a:ea typeface="Menlo" panose="020B0609030804020204" pitchFamily="49" charset="0"/>
+                <a:cs typeface="Menlo" panose="020B0609030804020204" pitchFamily="49" charset="0"/>
+              </a:rPr>
+              <a:t>Roaring_Tiger_rgb.svg</a:t>
+            </a:r>
+            <a:r>
+              <a:rPr lang="en-US" dirty="0">
+                <a:solidFill>
+                  <a:schemeClr val="accent5">
+                    <a:lumMod val="75000"/>
+                  </a:schemeClr>
+                </a:solidFill>
+                <a:latin typeface="Menlo" panose="020B0609030804020204" pitchFamily="49" charset="0"/>
+                <a:ea typeface="Menlo" panose="020B0609030804020204" pitchFamily="49" charset="0"/>
+                <a:cs typeface="Menlo" panose="020B0609030804020204" pitchFamily="49" charset="0"/>
+              </a:rPr>
+              <a:t>" alt="RIT Tiger Spirit Mark" width="150"&gt;</a:t>
+            </a:r>
+            <a:endParaRPr lang="en-US" sz="1800" dirty="0">
+              <a:solidFill>
+                <a:schemeClr val="accent5">
+                  <a:lumMod val="75000"/>
+                </a:schemeClr>
+              </a:solidFill>
+              <a:latin typeface="Menlo" panose="020B0609030804020204" pitchFamily="49" charset="0"/>
+              <a:ea typeface="Menlo" panose="020B0609030804020204" pitchFamily="49" charset="0"/>
+              <a:cs typeface="Menlo" panose="020B0609030804020204" pitchFamily="49" charset="0"/>
+            </a:endParaRPr>
+          </a:p>
+        </p:txBody>
+      </p:sp>
+      <p:pic>
+        <p:nvPicPr>
+          <p:cNvPr id="10" name="Picture 9">
+            <a:extLst>
+              <a:ext uri="{FF2B5EF4-FFF2-40B4-BE49-F238E27FC236}">
+                <a16:creationId xmlns:a16="http://schemas.microsoft.com/office/drawing/2014/main" id="{D1154491-8D39-397D-4CBB-049A44EB72D6}"/>
+              </a:ext>
+            </a:extLst>
+          </p:cNvPr>
+          <p:cNvPicPr>
+            <a:picLocks noChangeAspect="1"/>
+          </p:cNvPicPr>
+          <p:nvPr/>
+        </p:nvPicPr>
+        <p:blipFill>
+          <a:blip r:embed="rId2"/>
+          <a:stretch>
+            <a:fillRect/>
+          </a:stretch>
+        </p:blipFill>
+        <p:spPr>
+          <a:xfrm>
+            <a:off x="6918593" y="3151833"/>
+            <a:ext cx="4869456" cy="2700013"/>
+          </a:xfrm>
+          <a:prstGeom prst="rect">
+            <a:avLst/>
+          </a:prstGeom>
+        </p:spPr>
+      </p:pic>
+    </p:spTree>
+    <p:extLst>
+      <p:ext uri="{BB962C8B-B14F-4D97-AF65-F5344CB8AC3E}">
+        <p14:creationId xmlns:p14="http://schemas.microsoft.com/office/powerpoint/2010/main" val="545802275"/>
+      </p:ext>
+    </p:extLst>
+  </p:cSld>
+  <p:clrMapOvr>
+    <a:masterClrMapping/>
+  </p:clrMapOvr>
+</p:sld>
+</file>
+
+<file path=ppt/slides/slide8.xml><?xml version="1.0" encoding="utf-8"?>
+<p:sld xmlns:a="http://schemas.openxmlformats.org/drawingml/2006/main" xmlns:r="http://schemas.openxmlformats.org/officeDocument/2006/relationships" xmlns:p="http://schemas.openxmlformats.org/presentationml/2006/main" show="0">
   <p:cSld>
     <p:spTree>
       <p:nvGrpSpPr>
@@ -8176,7 +9318,7 @@
     </p:spTree>
     <p:extLst>
       <p:ext uri="{BB962C8B-B14F-4D97-AF65-F5344CB8AC3E}">
-        <p14:creationId xmlns:p14="http://schemas.microsoft.com/office/powerpoint/2010/main" val="545802275"/>
+        <p14:creationId xmlns:p14="http://schemas.microsoft.com/office/powerpoint/2010/main" val="2772873257"/>
       </p:ext>
     </p:extLst>
   </p:cSld>
@@ -8186,7 +9328,7 @@
 </p:sld>
 </file>
 
-<file path=ppt/slides/slide7.xml><?xml version="1.0" encoding="utf-8"?>
+<file path=ppt/slides/slide9.xml><?xml version="1.0" encoding="utf-8"?>
 <p:sld xmlns:a="http://schemas.openxmlformats.org/drawingml/2006/main" xmlns:r="http://schemas.openxmlformats.org/officeDocument/2006/relationships" xmlns:p="http://schemas.openxmlformats.org/presentationml/2006/main">
   <p:cSld>
     <p:spTree>
@@ -8267,45 +9409,21 @@
           <a:p>
             <a:pPr marL="514350" indent="-514350">
               <a:buFont typeface="+mj-lt"/>
-              <a:buAutoNum type="arabicPeriod" startAt="3"/>
+              <a:buAutoNum type="arabicPeriod"/>
             </a:pPr>
             <a:r>
               <a:rPr lang="en-US" sz="2600" dirty="0"/>
-              <a:t>Make the logo to look more "futuristic" Search for "Task 5..." and modify the &lt;h1&gt; tag as shown below:</a:t>
-            </a:r>
-          </a:p>
-          <a:p>
-            <a:pPr marL="295275" indent="-295275">
+              <a:t>Find Task 3 in the manual and in code.</a:t>
+            </a:r>
+          </a:p>
+          <a:p>
+            <a:pPr marL="514350" indent="-514350">
               <a:buFont typeface="+mj-lt"/>
-              <a:buAutoNum type="arabicPeriod" startAt="3"/>
+              <a:buAutoNum type="arabicPeriod"/>
             </a:pPr>
-            <a:endParaRPr lang="en-US" sz="2200" dirty="0"/>
-          </a:p>
-          <a:p>
-            <a:pPr marL="295275" indent="-285750">
-              <a:spcBef>
-                <a:spcPts val="1000"/>
-              </a:spcBef>
-              <a:buNone/>
-            </a:pPr>
-            <a:r>
-              <a:rPr lang="en-US" sz="2200" dirty="0"/>
-              <a:t>	</a:t>
-            </a:r>
-          </a:p>
-          <a:p>
-            <a:pPr marL="0" indent="0">
-              <a:buNone/>
-            </a:pPr>
-            <a:endParaRPr lang="en-US" sz="2200" dirty="0"/>
-          </a:p>
-          <a:p>
-            <a:pPr marL="295275" indent="-295275">
-              <a:buNone/>
-            </a:pPr>
             <a:r>
               <a:rPr lang="en-US" sz="2600" dirty="0"/>
-              <a:t>	Save and refresh the browser. Magic!</a:t>
+              <a:t>Add some spacing after the prompt to make the page more professional</a:t>
             </a:r>
           </a:p>
           <a:p>
@@ -8330,7 +9448,7 @@
         </p:nvSpPr>
         <p:spPr>
           <a:xfrm>
-            <a:off x="1551196" y="2916449"/>
+            <a:off x="1653672" y="3523421"/>
             <a:ext cx="5863156" cy="369332"/>
           </a:xfrm>
           <a:prstGeom prst="rect">
@@ -8344,11 +9462,8 @@
           </a:bodyPr>
           <a:lstStyle/>
           <a:p>
-            <a:pPr marL="0" indent="0">
-              <a:buNone/>
-            </a:pPr>
-            <a:r>
-              <a:rPr lang="en-US" sz="1800" dirty="0">
+            <a:r>
+              <a:rPr lang="en-US" dirty="0">
                 <a:solidFill>
                   <a:schemeClr val="accent5">
                     <a:lumMod val="75000"/>
@@ -8358,86 +9473,18 @@
                 <a:ea typeface="Menlo" panose="020B0609030804020204" pitchFamily="49" charset="0"/>
                 <a:cs typeface="Menlo" panose="020B0609030804020204" pitchFamily="49" charset="0"/>
               </a:rPr>
-              <a:t>&lt;h1 </a:t>
-            </a:r>
-            <a:r>
-              <a:rPr lang="en-US" sz="1800" b="1" dirty="0">
-                <a:solidFill>
-                  <a:schemeClr val="accent5">
-                    <a:lumMod val="75000"/>
-                  </a:schemeClr>
-                </a:solidFill>
-                <a:latin typeface="Menlo" panose="020B0609030804020204" pitchFamily="49" charset="0"/>
-                <a:ea typeface="Menlo" panose="020B0609030804020204" pitchFamily="49" charset="0"/>
-                <a:cs typeface="Menlo" panose="020B0609030804020204" pitchFamily="49" charset="0"/>
-              </a:rPr>
-              <a:t>class="</a:t>
-            </a:r>
-            <a:r>
-              <a:rPr lang="en-US" sz="1800" b="1" dirty="0" err="1">
-                <a:solidFill>
-                  <a:schemeClr val="accent5">
-                    <a:lumMod val="75000"/>
-                  </a:schemeClr>
-                </a:solidFill>
-                <a:latin typeface="Menlo" panose="020B0609030804020204" pitchFamily="49" charset="0"/>
-                <a:ea typeface="Menlo" panose="020B0609030804020204" pitchFamily="49" charset="0"/>
-                <a:cs typeface="Menlo" panose="020B0609030804020204" pitchFamily="49" charset="0"/>
-              </a:rPr>
-              <a:t>orbitron</a:t>
-            </a:r>
-            <a:r>
-              <a:rPr lang="en-US" sz="1800" b="1" dirty="0">
-                <a:solidFill>
-                  <a:schemeClr val="accent5">
-                    <a:lumMod val="75000"/>
-                  </a:schemeClr>
-                </a:solidFill>
-                <a:latin typeface="Menlo" panose="020B0609030804020204" pitchFamily="49" charset="0"/>
-                <a:ea typeface="Menlo" panose="020B0609030804020204" pitchFamily="49" charset="0"/>
-                <a:cs typeface="Menlo" panose="020B0609030804020204" pitchFamily="49" charset="0"/>
-              </a:rPr>
-              <a:t>-fancy"</a:t>
-            </a:r>
-            <a:r>
-              <a:rPr lang="en-US" sz="1800" dirty="0">
-                <a:solidFill>
-                  <a:schemeClr val="accent5">
-                    <a:lumMod val="75000"/>
-                  </a:schemeClr>
-                </a:solidFill>
-                <a:latin typeface="Menlo" panose="020B0609030804020204" pitchFamily="49" charset="0"/>
-                <a:ea typeface="Menlo" panose="020B0609030804020204" pitchFamily="49" charset="0"/>
-                <a:cs typeface="Menlo" panose="020B0609030804020204" pitchFamily="49" charset="0"/>
-              </a:rPr>
-              <a:t>&gt;</a:t>
-            </a:r>
-            <a:r>
-              <a:rPr lang="en-US" sz="1800" dirty="0" err="1">
-                <a:solidFill>
-                  <a:schemeClr val="accent5">
-                    <a:lumMod val="75000"/>
-                  </a:schemeClr>
-                </a:solidFill>
-                <a:latin typeface="Menlo" panose="020B0609030804020204" pitchFamily="49" charset="0"/>
-                <a:ea typeface="Menlo" panose="020B0609030804020204" pitchFamily="49" charset="0"/>
-                <a:cs typeface="Menlo" panose="020B0609030804020204" pitchFamily="49" charset="0"/>
-              </a:rPr>
-              <a:t>TigerGPT</a:t>
-            </a:r>
-            <a:r>
-              <a:rPr lang="en-US" sz="1800" dirty="0">
-                <a:solidFill>
-                  <a:schemeClr val="accent5">
-                    <a:lumMod val="75000"/>
-                  </a:schemeClr>
-                </a:solidFill>
-                <a:latin typeface="Menlo" panose="020B0609030804020204" pitchFamily="49" charset="0"/>
-                <a:ea typeface="Menlo" panose="020B0609030804020204" pitchFamily="49" charset="0"/>
-                <a:cs typeface="Menlo" panose="020B0609030804020204" pitchFamily="49" charset="0"/>
-              </a:rPr>
-              <a:t>&lt;/h1&gt;</a:t>
-            </a:r>
+              <a:t>&lt;div class="container p-2 card mb-25" id="input-area"&gt;</a:t>
+            </a:r>
+            <a:endParaRPr lang="en-US" sz="1800" dirty="0">
+              <a:solidFill>
+                <a:schemeClr val="accent5">
+                  <a:lumMod val="75000"/>
+                </a:schemeClr>
+              </a:solidFill>
+              <a:latin typeface="Menlo" panose="020B0609030804020204" pitchFamily="49" charset="0"/>
+              <a:ea typeface="Menlo" panose="020B0609030804020204" pitchFamily="49" charset="0"/>
+              <a:cs typeface="Menlo" panose="020B0609030804020204" pitchFamily="49" charset="0"/>
+            </a:endParaRPr>
           </a:p>
         </p:txBody>
       </p:sp>
@@ -8463,8 +9510,8 @@
         </p:blipFill>
         <p:spPr>
           <a:xfrm>
-            <a:off x="7181485" y="3429000"/>
-            <a:ext cx="4562132" cy="2906150"/>
+            <a:off x="7017745" y="3192345"/>
+            <a:ext cx="4774950" cy="2601365"/>
           </a:xfrm>
           <a:prstGeom prst="rect">
             <a:avLst/>
@@ -8475,242 +9522,6 @@
     <p:extLst>
       <p:ext uri="{BB962C8B-B14F-4D97-AF65-F5344CB8AC3E}">
         <p14:creationId xmlns:p14="http://schemas.microsoft.com/office/powerpoint/2010/main" val="445096004"/>
-      </p:ext>
-    </p:extLst>
-  </p:cSld>
-  <p:clrMapOvr>
-    <a:masterClrMapping/>
-  </p:clrMapOvr>
-</p:sld>
-</file>
-
-<file path=ppt/slides/slide8.xml><?xml version="1.0" encoding="utf-8"?>
-<p:sld xmlns:a="http://schemas.openxmlformats.org/drawingml/2006/main" xmlns:r="http://schemas.openxmlformats.org/officeDocument/2006/relationships" xmlns:p="http://schemas.openxmlformats.org/presentationml/2006/main">
-  <p:cSld>
-    <p:spTree>
-      <p:nvGrpSpPr>
-        <p:cNvPr id="1" name=""/>
-        <p:cNvGrpSpPr/>
-        <p:nvPr/>
-      </p:nvGrpSpPr>
-      <p:grpSpPr>
-        <a:xfrm>
-          <a:off x="0" y="0"/>
-          <a:ext cx="0" cy="0"/>
-          <a:chOff x="0" y="0"/>
-          <a:chExt cx="0" cy="0"/>
-        </a:xfrm>
-      </p:grpSpPr>
-      <p:sp>
-        <p:nvSpPr>
-          <p:cNvPr id="2" name="Title 1">
-            <a:extLst>
-              <a:ext uri="{FF2B5EF4-FFF2-40B4-BE49-F238E27FC236}">
-                <a16:creationId xmlns:a16="http://schemas.microsoft.com/office/drawing/2014/main" id="{10EA01F3-F16B-629E-E754-47034C3EBB09}"/>
-              </a:ext>
-            </a:extLst>
-          </p:cNvPr>
-          <p:cNvSpPr>
-            <a:spLocks noGrp="1"/>
-          </p:cNvSpPr>
-          <p:nvPr>
-            <p:ph type="title"/>
-          </p:nvPr>
-        </p:nvSpPr>
-        <p:spPr>
-          <a:xfrm>
-            <a:off x="1251678" y="382385"/>
-            <a:ext cx="10178322" cy="928622"/>
-          </a:xfrm>
-        </p:spPr>
-        <p:txBody>
-          <a:bodyPr/>
-          <a:lstStyle/>
-          <a:p>
-            <a:pPr algn="ctr"/>
-            <a:r>
-              <a:rPr lang="en-US" dirty="0"/>
-              <a:t>The End</a:t>
-            </a:r>
-          </a:p>
-        </p:txBody>
-      </p:sp>
-      <p:sp>
-        <p:nvSpPr>
-          <p:cNvPr id="3" name="Content Placeholder 2">
-            <a:extLst>
-              <a:ext uri="{FF2B5EF4-FFF2-40B4-BE49-F238E27FC236}">
-                <a16:creationId xmlns:a16="http://schemas.microsoft.com/office/drawing/2014/main" id="{77415AFB-FBD4-2DE3-F2D3-5EA0B4B66C30}"/>
-              </a:ext>
-            </a:extLst>
-          </p:cNvPr>
-          <p:cNvSpPr>
-            <a:spLocks noGrp="1"/>
-          </p:cNvSpPr>
-          <p:nvPr>
-            <p:ph idx="1"/>
-          </p:nvPr>
-        </p:nvSpPr>
-        <p:spPr>
-          <a:xfrm>
-            <a:off x="1251679" y="1311007"/>
-            <a:ext cx="10448234" cy="2423711"/>
-          </a:xfrm>
-        </p:spPr>
-        <p:txBody>
-          <a:bodyPr>
-            <a:normAutofit/>
-          </a:bodyPr>
-          <a:lstStyle/>
-          <a:p>
-            <a:r>
-              <a:rPr lang="en-US" sz="2600" dirty="0"/>
-              <a:t>Time is up. Go ahead and type a question into the </a:t>
-            </a:r>
-            <a:r>
-              <a:rPr lang="en-US" sz="2600" dirty="0" err="1"/>
-              <a:t>TigerChat</a:t>
-            </a:r>
-            <a:r>
-              <a:rPr lang="en-US" sz="2600" dirty="0"/>
-              <a:t> prompt.</a:t>
-            </a:r>
-          </a:p>
-          <a:p>
-            <a:pPr marL="295275" indent="-295275">
-              <a:buNone/>
-            </a:pPr>
-            <a:r>
-              <a:rPr lang="en-US" sz="2600" dirty="0"/>
-              <a:t>	Example: </a:t>
-            </a:r>
-            <a:r>
-              <a:rPr lang="en-US" sz="2600" i="1"/>
-              <a:t>Write an </a:t>
-            </a:r>
-            <a:r>
-              <a:rPr lang="en-US" sz="2600" i="1" dirty="0"/>
-              <a:t>eight-line poem about the first year of college.</a:t>
-            </a:r>
-            <a:endParaRPr lang="en-US" sz="2600" dirty="0"/>
-          </a:p>
-          <a:p>
-            <a:pPr marL="295275" indent="-295275">
-              <a:buFont typeface="+mj-lt"/>
-              <a:buAutoNum type="arabicPeriod"/>
-            </a:pPr>
-            <a:endParaRPr lang="en-US" sz="2600" dirty="0"/>
-          </a:p>
-          <a:p>
-            <a:pPr marL="295275" indent="-285750">
-              <a:spcBef>
-                <a:spcPts val="1000"/>
-              </a:spcBef>
-              <a:buNone/>
-            </a:pPr>
-            <a:r>
-              <a:rPr lang="en-US" sz="2600" dirty="0"/>
-              <a:t>	Did you get a good answer?</a:t>
-            </a:r>
-          </a:p>
-          <a:p>
-            <a:pPr marL="0" indent="0">
-              <a:buNone/>
-            </a:pPr>
-            <a:endParaRPr lang="en-US" sz="2200" dirty="0"/>
-          </a:p>
-        </p:txBody>
-      </p:sp>
-      <p:sp>
-        <p:nvSpPr>
-          <p:cNvPr id="6" name="TextBox 5">
-            <a:extLst>
-              <a:ext uri="{FF2B5EF4-FFF2-40B4-BE49-F238E27FC236}">
-                <a16:creationId xmlns:a16="http://schemas.microsoft.com/office/drawing/2014/main" id="{AA7AF900-7FBF-25BB-A786-7B9658BE64E5}"/>
-              </a:ext>
-            </a:extLst>
-          </p:cNvPr>
-          <p:cNvSpPr txBox="1"/>
-          <p:nvPr/>
-        </p:nvSpPr>
-        <p:spPr>
-          <a:xfrm>
-            <a:off x="2733447" y="4183522"/>
-            <a:ext cx="7214784" cy="1569660"/>
-          </a:xfrm>
-          <a:prstGeom prst="rect">
-            <a:avLst/>
-          </a:prstGeom>
-          <a:noFill/>
-        </p:spPr>
-        <p:txBody>
-          <a:bodyPr wrap="square">
-            <a:spAutoFit/>
-          </a:bodyPr>
-          <a:lstStyle/>
-          <a:p>
-            <a:pPr algn="ctr"/>
-            <a:r>
-              <a:rPr lang="en-US" sz="3200" dirty="0">
-                <a:solidFill>
-                  <a:schemeClr val="accent5">
-                    <a:lumMod val="75000"/>
-                  </a:schemeClr>
-                </a:solidFill>
-                <a:latin typeface="Corbel" panose="020B0503020204020204" pitchFamily="34" charset="0"/>
-              </a:rPr>
-              <a:t>Thanks for participating. </a:t>
-            </a:r>
-            <a:br>
-              <a:rPr lang="en-US" sz="3200" dirty="0">
-                <a:solidFill>
-                  <a:schemeClr val="accent5">
-                    <a:lumMod val="75000"/>
-                  </a:schemeClr>
-                </a:solidFill>
-                <a:latin typeface="Corbel" panose="020B0503020204020204" pitchFamily="34" charset="0"/>
-              </a:rPr>
-            </a:br>
-            <a:r>
-              <a:rPr lang="en-US" sz="3200" dirty="0">
-                <a:solidFill>
-                  <a:schemeClr val="accent5">
-                    <a:lumMod val="75000"/>
-                  </a:schemeClr>
-                </a:solidFill>
-                <a:latin typeface="Corbel" panose="020B0503020204020204" pitchFamily="34" charset="0"/>
-              </a:rPr>
-              <a:t>Join us on Wednesday for an </a:t>
-            </a:r>
-            <a:r>
-              <a:rPr lang="en-US" sz="3200" i="1" dirty="0">
-                <a:solidFill>
-                  <a:schemeClr val="accent5">
-                    <a:lumMod val="75000"/>
-                  </a:schemeClr>
-                </a:solidFill>
-                <a:latin typeface="Corbel" panose="020B0503020204020204" pitchFamily="34" charset="0"/>
-              </a:rPr>
-              <a:t>extended</a:t>
-            </a:r>
-            <a:r>
-              <a:rPr lang="en-US" sz="3200" dirty="0">
-                <a:solidFill>
-                  <a:schemeClr val="accent5">
-                    <a:lumMod val="75000"/>
-                  </a:schemeClr>
-                </a:solidFill>
-                <a:latin typeface="Corbel" panose="020B0503020204020204" pitchFamily="34" charset="0"/>
-              </a:rPr>
-              <a:t> web development experience.</a:t>
-            </a:r>
-          </a:p>
-        </p:txBody>
-      </p:sp>
-    </p:spTree>
-    <p:extLst>
-      <p:ext uri="{BB962C8B-B14F-4D97-AF65-F5344CB8AC3E}">
-        <p14:creationId xmlns:p14="http://schemas.microsoft.com/office/powerpoint/2010/main" val="1254606585"/>
       </p:ext>
     </p:extLst>
   </p:cSld>
